--- a/docs/ארכיטקטוררה.pptx
+++ b/docs/ארכיטקטוררה.pptx
@@ -9,6 +9,8 @@
     <p:sldId id="257" r:id="rId3"/>
     <p:sldId id="259" r:id="rId4"/>
     <p:sldId id="258" r:id="rId5"/>
+    <p:sldId id="260" r:id="rId6"/>
+    <p:sldId id="261" r:id="rId7"/>
   </p:sldIdLst>
   <p:sldSz cx="12192000" cy="6858000"/>
   <p:notesSz cx="6858000" cy="9144000"/>
@@ -3367,51 +3369,23 @@
           </a:fontRef>
         </p:style>
         <p:txBody>
-          <a:bodyPr rtlCol="1" anchor="ctr"/>
+          <a:bodyPr rtlCol="1" anchor="t"/>
           <a:lstStyle/>
           <a:p>
             <a:pPr algn="ctr"/>
-            <a:endParaRPr lang="he-IL" dirty="0"/>
-          </a:p>
-        </p:txBody>
-      </p:sp>
-      <p:sp>
-        <p:nvSpPr>
-          <p:cNvPr id="5" name="תיבת טקסט 4">
-            <a:extLst>
-              <a:ext uri="{FF2B5EF4-FFF2-40B4-BE49-F238E27FC236}">
-                <a16:creationId xmlns:a16="http://schemas.microsoft.com/office/drawing/2014/main" id="{36E599E7-CFD7-7789-4D36-AF02DC6CBBEE}"/>
-              </a:ext>
-            </a:extLst>
-          </p:cNvPr>
-          <p:cNvSpPr txBox="1"/>
-          <p:nvPr/>
-        </p:nvSpPr>
-        <p:spPr>
-          <a:xfrm>
-            <a:off x="3488634" y="268357"/>
-            <a:ext cx="5635487" cy="646331"/>
-          </a:xfrm>
-          <a:prstGeom prst="rect">
-            <a:avLst/>
-          </a:prstGeom>
-          <a:noFill/>
-        </p:spPr>
-        <p:txBody>
-          <a:bodyPr wrap="square" rtlCol="1">
-            <a:spAutoFit/>
-          </a:bodyPr>
-          <a:lstStyle/>
-          <a:p>
-            <a:pPr algn="ctr"/>
-            <a:r>
-              <a:rPr lang="he-IL" sz="3600" b="1" dirty="0">
+            <a:r>
+              <a:rPr lang="he-IL" sz="4000" b="1">
                 <a:solidFill>
                   <a:schemeClr val="bg1"/>
                 </a:solidFill>
               </a:rPr>
               <a:t>סוכן ראשי</a:t>
             </a:r>
+            <a:endParaRPr lang="he-IL" sz="4000" b="1" dirty="0">
+              <a:solidFill>
+                <a:schemeClr val="bg1"/>
+              </a:solidFill>
+            </a:endParaRPr>
           </a:p>
         </p:txBody>
       </p:sp>
@@ -3604,6 +3578,7 @@
       <p:sp>
         <p:nvSpPr>
           <p:cNvPr id="9" name="מלבן 8">
+            <a:hlinkClick r:id="rId2" action="ppaction://hlinksldjump"/>
             <a:extLst>
               <a:ext uri="{FF2B5EF4-FFF2-40B4-BE49-F238E27FC236}">
                 <a16:creationId xmlns:a16="http://schemas.microsoft.com/office/drawing/2014/main" id="{1F675D27-9D22-E7D1-8A6E-FEF5CF98392D}"/>
@@ -3801,6 +3776,7 @@
       <p:sp>
         <p:nvSpPr>
           <p:cNvPr id="12" name="מלבן 11">
+            <a:hlinkClick r:id="rId3" action="ppaction://hlinksldjump"/>
             <a:extLst>
               <a:ext uri="{FF2B5EF4-FFF2-40B4-BE49-F238E27FC236}">
                 <a16:creationId xmlns:a16="http://schemas.microsoft.com/office/drawing/2014/main" id="{DEE3D9B0-76AE-4209-B3CF-BD34FF262560}"/>
@@ -3959,6 +3935,18 @@
   <p:clrMapOvr>
     <a:masterClrMapping/>
   </p:clrMapOvr>
+  <mc:AlternateContent xmlns:mc="http://schemas.openxmlformats.org/markup-compatibility/2006">
+    <mc:Choice xmlns:p159="http://schemas.microsoft.com/office/powerpoint/2015/09/main" Requires="p159">
+      <p:transition xmlns:p14="http://schemas.microsoft.com/office/powerpoint/2010/main" spd="slow" p14:dur="2000">
+        <p159:morph option="byObject"/>
+      </p:transition>
+    </mc:Choice>
+    <mc:Fallback>
+      <p:transition spd="slow">
+        <p:fade/>
+      </p:transition>
+    </mc:Fallback>
+  </mc:AlternateContent>
 </p:sld>
 </file>
 
@@ -4655,6 +4643,171 @@
           </a:p>
         </p:txBody>
       </p:sp>
+      <p:sp>
+        <p:nvSpPr>
+          <p:cNvPr id="2" name="מלבן 1">
+            <a:extLst>
+              <a:ext uri="{FF2B5EF4-FFF2-40B4-BE49-F238E27FC236}">
+                <a16:creationId xmlns:a16="http://schemas.microsoft.com/office/drawing/2014/main" id="{5C507325-F8EA-73CF-5355-1529C0F2045C}"/>
+              </a:ext>
+            </a:extLst>
+          </p:cNvPr>
+          <p:cNvSpPr/>
+          <p:nvPr/>
+        </p:nvSpPr>
+        <p:spPr>
+          <a:xfrm>
+            <a:off x="1474303" y="3607908"/>
+            <a:ext cx="9243394" cy="665922"/>
+          </a:xfrm>
+          <a:prstGeom prst="rect">
+            <a:avLst/>
+          </a:prstGeom>
+          <a:solidFill>
+            <a:schemeClr val="bg1">
+              <a:lumMod val="65000"/>
+            </a:schemeClr>
+          </a:solidFill>
+        </p:spPr>
+        <p:style>
+          <a:lnRef idx="2">
+            <a:schemeClr val="accent1">
+              <a:shade val="15000"/>
+            </a:schemeClr>
+          </a:lnRef>
+          <a:fillRef idx="1">
+            <a:schemeClr val="accent1"/>
+          </a:fillRef>
+          <a:effectRef idx="0">
+            <a:schemeClr val="accent1"/>
+          </a:effectRef>
+          <a:fontRef idx="minor">
+            <a:schemeClr val="lt1"/>
+          </a:fontRef>
+        </p:style>
+        <p:txBody>
+          <a:bodyPr rtlCol="1" anchor="t"/>
+          <a:lstStyle/>
+          <a:p>
+            <a:pPr algn="l"/>
+            <a:r>
+              <a:rPr lang="en-US" sz="3600" dirty="0"/>
+              <a:t>CRUD /Protocol</a:t>
+            </a:r>
+            <a:endParaRPr lang="he-IL" sz="3600" dirty="0"/>
+          </a:p>
+        </p:txBody>
+      </p:sp>
+      <p:sp>
+        <p:nvSpPr>
+          <p:cNvPr id="4" name="מלבן 3">
+            <a:extLst>
+              <a:ext uri="{FF2B5EF4-FFF2-40B4-BE49-F238E27FC236}">
+                <a16:creationId xmlns:a16="http://schemas.microsoft.com/office/drawing/2014/main" id="{E861C3A8-21F2-C310-037E-19ADF528107B}"/>
+              </a:ext>
+            </a:extLst>
+          </p:cNvPr>
+          <p:cNvSpPr/>
+          <p:nvPr/>
+        </p:nvSpPr>
+        <p:spPr>
+          <a:xfrm>
+            <a:off x="1474302" y="4770787"/>
+            <a:ext cx="9243394" cy="665922"/>
+          </a:xfrm>
+          <a:prstGeom prst="rect">
+            <a:avLst/>
+          </a:prstGeom>
+          <a:solidFill>
+            <a:schemeClr val="bg1">
+              <a:lumMod val="65000"/>
+            </a:schemeClr>
+          </a:solidFill>
+        </p:spPr>
+        <p:style>
+          <a:lnRef idx="2">
+            <a:schemeClr val="accent1">
+              <a:shade val="15000"/>
+            </a:schemeClr>
+          </a:lnRef>
+          <a:fillRef idx="1">
+            <a:schemeClr val="accent1"/>
+          </a:fillRef>
+          <a:effectRef idx="0">
+            <a:schemeClr val="accent1"/>
+          </a:effectRef>
+          <a:fontRef idx="minor">
+            <a:schemeClr val="lt1"/>
+          </a:fontRef>
+        </p:style>
+        <p:txBody>
+          <a:bodyPr rtlCol="1" anchor="t"/>
+          <a:lstStyle/>
+          <a:p>
+            <a:pPr algn="l"/>
+            <a:r>
+              <a:rPr lang="en-US" sz="3600" dirty="0"/>
+              <a:t>GET /SYSTEM</a:t>
+            </a:r>
+            <a:endParaRPr lang="he-IL" sz="3600" dirty="0"/>
+          </a:p>
+        </p:txBody>
+      </p:sp>
+      <p:sp>
+        <p:nvSpPr>
+          <p:cNvPr id="6" name="מלבן 5">
+            <a:extLst>
+              <a:ext uri="{FF2B5EF4-FFF2-40B4-BE49-F238E27FC236}">
+                <a16:creationId xmlns:a16="http://schemas.microsoft.com/office/drawing/2014/main" id="{E71D3668-866B-5522-7A11-8EA3C341D36B}"/>
+              </a:ext>
+            </a:extLst>
+          </p:cNvPr>
+          <p:cNvSpPr/>
+          <p:nvPr/>
+        </p:nvSpPr>
+        <p:spPr>
+          <a:xfrm>
+            <a:off x="1474302" y="5814398"/>
+            <a:ext cx="9243394" cy="665922"/>
+          </a:xfrm>
+          <a:prstGeom prst="rect">
+            <a:avLst/>
+          </a:prstGeom>
+          <a:solidFill>
+            <a:schemeClr val="bg1">
+              <a:lumMod val="65000"/>
+            </a:schemeClr>
+          </a:solidFill>
+        </p:spPr>
+        <p:style>
+          <a:lnRef idx="2">
+            <a:schemeClr val="accent1">
+              <a:shade val="15000"/>
+            </a:schemeClr>
+          </a:lnRef>
+          <a:fillRef idx="1">
+            <a:schemeClr val="accent1"/>
+          </a:fillRef>
+          <a:effectRef idx="0">
+            <a:schemeClr val="accent1"/>
+          </a:effectRef>
+          <a:fontRef idx="minor">
+            <a:schemeClr val="lt1"/>
+          </a:fontRef>
+        </p:style>
+        <p:txBody>
+          <a:bodyPr rtlCol="1" anchor="t"/>
+          <a:lstStyle/>
+          <a:p>
+            <a:pPr algn="l"/>
+            <a:r>
+              <a:rPr lang="en-US" sz="3600" dirty="0"/>
+              <a:t>PUT /SYSTEM</a:t>
+            </a:r>
+            <a:endParaRPr lang="he-IL" sz="3600" dirty="0"/>
+          </a:p>
+        </p:txBody>
+      </p:sp>
     </p:spTree>
     <p:extLst>
       <p:ext uri="{BB962C8B-B14F-4D97-AF65-F5344CB8AC3E}">
@@ -4665,6 +4818,539 @@
   <p:clrMapOvr>
     <a:masterClrMapping/>
   </p:clrMapOvr>
+</p:sld>
+</file>
+
+<file path=ppt/slides/slide5.xml><?xml version="1.0" encoding="utf-8"?>
+<p:sld xmlns:a="http://schemas.openxmlformats.org/drawingml/2006/main" xmlns:r="http://schemas.openxmlformats.org/officeDocument/2006/relationships" xmlns:p="http://schemas.openxmlformats.org/presentationml/2006/main">
+  <p:cSld>
+    <p:spTree>
+      <p:nvGrpSpPr>
+        <p:cNvPr id="1" name="">
+          <a:extLst>
+            <a:ext uri="{FF2B5EF4-FFF2-40B4-BE49-F238E27FC236}">
+              <a16:creationId xmlns:a16="http://schemas.microsoft.com/office/drawing/2014/main" id="{BD1FADAD-4FD9-DAFD-9D88-005EB405035B}"/>
+            </a:ext>
+          </a:extLst>
+        </p:cNvPr>
+        <p:cNvGrpSpPr/>
+        <p:nvPr/>
+      </p:nvGrpSpPr>
+      <p:grpSpPr>
+        <a:xfrm>
+          <a:off x="0" y="0"/>
+          <a:ext cx="0" cy="0"/>
+          <a:chOff x="0" y="0"/>
+          <a:chExt cx="0" cy="0"/>
+        </a:xfrm>
+      </p:grpSpPr>
+      <p:sp>
+        <p:nvSpPr>
+          <p:cNvPr id="5" name="מלבן 4">
+            <a:extLst>
+              <a:ext uri="{FF2B5EF4-FFF2-40B4-BE49-F238E27FC236}">
+                <a16:creationId xmlns:a16="http://schemas.microsoft.com/office/drawing/2014/main" id="{224CD16E-4257-9F04-7D38-B3DE9E1BD72A}"/>
+              </a:ext>
+            </a:extLst>
+          </p:cNvPr>
+          <p:cNvSpPr/>
+          <p:nvPr/>
+        </p:nvSpPr>
+        <p:spPr>
+          <a:xfrm>
+            <a:off x="579782" y="238539"/>
+            <a:ext cx="11032435" cy="6380921"/>
+          </a:xfrm>
+          <a:prstGeom prst="rect">
+            <a:avLst/>
+          </a:prstGeom>
+        </p:spPr>
+        <p:style>
+          <a:lnRef idx="2">
+            <a:schemeClr val="accent1">
+              <a:shade val="15000"/>
+            </a:schemeClr>
+          </a:lnRef>
+          <a:fillRef idx="1">
+            <a:schemeClr val="accent1"/>
+          </a:fillRef>
+          <a:effectRef idx="0">
+            <a:schemeClr val="accent1"/>
+          </a:effectRef>
+          <a:fontRef idx="minor">
+            <a:schemeClr val="lt1"/>
+          </a:fontRef>
+        </p:style>
+        <p:txBody>
+          <a:bodyPr rtlCol="1" anchor="t"/>
+          <a:lstStyle/>
+          <a:p>
+            <a:pPr algn="ctr"/>
+            <a:r>
+              <a:rPr lang="en-US" sz="3600" dirty="0"/>
+              <a:t>ENDPOINTS</a:t>
+            </a:r>
+            <a:endParaRPr lang="he-IL" sz="3600" dirty="0"/>
+          </a:p>
+        </p:txBody>
+      </p:sp>
+    </p:spTree>
+    <p:extLst>
+      <p:ext uri="{BB962C8B-B14F-4D97-AF65-F5344CB8AC3E}">
+        <p14:creationId xmlns:p14="http://schemas.microsoft.com/office/powerpoint/2010/main" val="3951418580"/>
+      </p:ext>
+    </p:extLst>
+  </p:cSld>
+  <p:clrMapOvr>
+    <a:masterClrMapping/>
+  </p:clrMapOvr>
+</p:sld>
+</file>
+
+<file path=ppt/slides/slide6.xml><?xml version="1.0" encoding="utf-8"?>
+<p:sld xmlns:a="http://schemas.openxmlformats.org/drawingml/2006/main" xmlns:r="http://schemas.openxmlformats.org/officeDocument/2006/relationships" xmlns:p="http://schemas.openxmlformats.org/presentationml/2006/main">
+  <p:cSld>
+    <p:spTree>
+      <p:nvGrpSpPr>
+        <p:cNvPr id="1" name="">
+          <a:extLst>
+            <a:ext uri="{FF2B5EF4-FFF2-40B4-BE49-F238E27FC236}">
+              <a16:creationId xmlns:a16="http://schemas.microsoft.com/office/drawing/2014/main" id="{AF3E9DBF-B551-7904-589F-6232450FA206}"/>
+            </a:ext>
+          </a:extLst>
+        </p:cNvPr>
+        <p:cNvGrpSpPr/>
+        <p:nvPr/>
+      </p:nvGrpSpPr>
+      <p:grpSpPr>
+        <a:xfrm>
+          <a:off x="0" y="0"/>
+          <a:ext cx="0" cy="0"/>
+          <a:chOff x="0" y="0"/>
+          <a:chExt cx="0" cy="0"/>
+        </a:xfrm>
+      </p:grpSpPr>
+      <p:sp>
+        <p:nvSpPr>
+          <p:cNvPr id="9" name="מלבן 8">
+            <a:extLst>
+              <a:ext uri="{FF2B5EF4-FFF2-40B4-BE49-F238E27FC236}">
+                <a16:creationId xmlns:a16="http://schemas.microsoft.com/office/drawing/2014/main" id="{07BB3862-7D0E-A731-9B8B-F37DC0166B5C}"/>
+              </a:ext>
+            </a:extLst>
+          </p:cNvPr>
+          <p:cNvSpPr/>
+          <p:nvPr/>
+        </p:nvSpPr>
+        <p:spPr>
+          <a:xfrm>
+            <a:off x="117987" y="265471"/>
+            <a:ext cx="11661058" cy="6469626"/>
+          </a:xfrm>
+          <a:prstGeom prst="rect">
+            <a:avLst/>
+          </a:prstGeom>
+          <a:solidFill>
+            <a:schemeClr val="tx1"/>
+          </a:solidFill>
+        </p:spPr>
+        <p:style>
+          <a:lnRef idx="2">
+            <a:schemeClr val="accent1">
+              <a:shade val="15000"/>
+            </a:schemeClr>
+          </a:lnRef>
+          <a:fillRef idx="1">
+            <a:schemeClr val="accent1"/>
+          </a:fillRef>
+          <a:effectRef idx="0">
+            <a:schemeClr val="accent1"/>
+          </a:effectRef>
+          <a:fontRef idx="minor">
+            <a:schemeClr val="lt1"/>
+          </a:fontRef>
+        </p:style>
+        <p:txBody>
+          <a:bodyPr rtlCol="1" anchor="t"/>
+          <a:lstStyle/>
+          <a:p>
+            <a:pPr algn="ctr"/>
+            <a:r>
+              <a:rPr lang="he-IL" sz="3600" b="1" dirty="0"/>
+              <a:t>מערכת ההיסטוריה</a:t>
+            </a:r>
+          </a:p>
+        </p:txBody>
+      </p:sp>
+      <p:sp>
+        <p:nvSpPr>
+          <p:cNvPr id="11" name="מלבן 10">
+            <a:extLst>
+              <a:ext uri="{FF2B5EF4-FFF2-40B4-BE49-F238E27FC236}">
+                <a16:creationId xmlns:a16="http://schemas.microsoft.com/office/drawing/2014/main" id="{EF6D02A2-7BBB-FEE2-4033-9CCAECAAE22F}"/>
+              </a:ext>
+            </a:extLst>
+          </p:cNvPr>
+          <p:cNvSpPr/>
+          <p:nvPr/>
+        </p:nvSpPr>
+        <p:spPr>
+          <a:xfrm>
+            <a:off x="1446304" y="1346374"/>
+            <a:ext cx="9004423" cy="1312109"/>
+          </a:xfrm>
+          <a:prstGeom prst="rect">
+            <a:avLst/>
+          </a:prstGeom>
+        </p:spPr>
+        <p:style>
+          <a:lnRef idx="2">
+            <a:schemeClr val="accent1">
+              <a:shade val="15000"/>
+            </a:schemeClr>
+          </a:lnRef>
+          <a:fillRef idx="1">
+            <a:schemeClr val="accent1"/>
+          </a:fillRef>
+          <a:effectRef idx="0">
+            <a:schemeClr val="accent1"/>
+          </a:effectRef>
+          <a:fontRef idx="minor">
+            <a:schemeClr val="lt1"/>
+          </a:fontRef>
+        </p:style>
+        <p:txBody>
+          <a:bodyPr rtlCol="1" anchor="ctr"/>
+          <a:lstStyle/>
+          <a:p>
+            <a:pPr algn="ctr"/>
+            <a:r>
+              <a:rPr lang="he-IL" sz="6600" dirty="0"/>
+              <a:t>סוכן היסטוריה</a:t>
+            </a:r>
+            <a:endParaRPr lang="en-US" sz="6600" dirty="0"/>
+          </a:p>
+        </p:txBody>
+      </p:sp>
+      <p:sp>
+        <p:nvSpPr>
+          <p:cNvPr id="13" name="מלבן 12">
+            <a:extLst>
+              <a:ext uri="{FF2B5EF4-FFF2-40B4-BE49-F238E27FC236}">
+                <a16:creationId xmlns:a16="http://schemas.microsoft.com/office/drawing/2014/main" id="{ECB6C679-8BBE-3022-8906-74130ED27F3D}"/>
+              </a:ext>
+            </a:extLst>
+          </p:cNvPr>
+          <p:cNvSpPr/>
+          <p:nvPr/>
+        </p:nvSpPr>
+        <p:spPr>
+          <a:xfrm>
+            <a:off x="1446304" y="5280420"/>
+            <a:ext cx="9004423" cy="1312109"/>
+          </a:xfrm>
+          <a:prstGeom prst="rect">
+            <a:avLst/>
+          </a:prstGeom>
+        </p:spPr>
+        <p:style>
+          <a:lnRef idx="2">
+            <a:schemeClr val="accent1">
+              <a:shade val="15000"/>
+            </a:schemeClr>
+          </a:lnRef>
+          <a:fillRef idx="1">
+            <a:schemeClr val="accent1"/>
+          </a:fillRef>
+          <a:effectRef idx="0">
+            <a:schemeClr val="accent1"/>
+          </a:effectRef>
+          <a:fontRef idx="minor">
+            <a:schemeClr val="lt1"/>
+          </a:fontRef>
+        </p:style>
+        <p:txBody>
+          <a:bodyPr rtlCol="1" anchor="ctr"/>
+          <a:lstStyle/>
+          <a:p>
+            <a:pPr algn="ctr"/>
+            <a:r>
+              <a:rPr lang="en-US" sz="8000" b="1" dirty="0"/>
+              <a:t>DB</a:t>
+            </a:r>
+          </a:p>
+        </p:txBody>
+      </p:sp>
+      <p:sp>
+        <p:nvSpPr>
+          <p:cNvPr id="14" name="מלבן 13">
+            <a:extLst>
+              <a:ext uri="{FF2B5EF4-FFF2-40B4-BE49-F238E27FC236}">
+                <a16:creationId xmlns:a16="http://schemas.microsoft.com/office/drawing/2014/main" id="{148A4966-E119-C491-6187-E305A7483849}"/>
+              </a:ext>
+            </a:extLst>
+          </p:cNvPr>
+          <p:cNvSpPr/>
+          <p:nvPr/>
+        </p:nvSpPr>
+        <p:spPr>
+          <a:xfrm>
+            <a:off x="9389806" y="3077499"/>
+            <a:ext cx="1060921" cy="1875466"/>
+          </a:xfrm>
+          <a:prstGeom prst="rect">
+            <a:avLst/>
+          </a:prstGeom>
+        </p:spPr>
+        <p:style>
+          <a:lnRef idx="2">
+            <a:schemeClr val="accent1">
+              <a:shade val="15000"/>
+            </a:schemeClr>
+          </a:lnRef>
+          <a:fillRef idx="1">
+            <a:schemeClr val="accent1"/>
+          </a:fillRef>
+          <a:effectRef idx="0">
+            <a:schemeClr val="accent1"/>
+          </a:effectRef>
+          <a:fontRef idx="minor">
+            <a:schemeClr val="lt1"/>
+          </a:fontRef>
+        </p:style>
+        <p:txBody>
+          <a:bodyPr rtlCol="1" anchor="ctr"/>
+          <a:lstStyle/>
+          <a:p>
+            <a:pPr algn="ctr"/>
+            <a:r>
+              <a:rPr lang="he-IL" sz="2000" dirty="0">
+                <a:solidFill>
+                  <a:srgbClr val="FFFF00"/>
+                </a:solidFill>
+              </a:rPr>
+              <a:t>סיכום שבועי \ חודשי \ ...</a:t>
+            </a:r>
+            <a:endParaRPr lang="en-US" sz="2000" dirty="0">
+              <a:solidFill>
+                <a:srgbClr val="FFFF00"/>
+              </a:solidFill>
+            </a:endParaRPr>
+          </a:p>
+        </p:txBody>
+      </p:sp>
+      <p:sp>
+        <p:nvSpPr>
+          <p:cNvPr id="15" name="מלבן 14">
+            <a:extLst>
+              <a:ext uri="{FF2B5EF4-FFF2-40B4-BE49-F238E27FC236}">
+                <a16:creationId xmlns:a16="http://schemas.microsoft.com/office/drawing/2014/main" id="{E899F42D-174F-1F62-9C47-C8947C1D7853}"/>
+              </a:ext>
+            </a:extLst>
+          </p:cNvPr>
+          <p:cNvSpPr/>
+          <p:nvPr/>
+        </p:nvSpPr>
+        <p:spPr>
+          <a:xfrm>
+            <a:off x="7074792" y="3077499"/>
+            <a:ext cx="1962017" cy="1875466"/>
+          </a:xfrm>
+          <a:prstGeom prst="rect">
+            <a:avLst/>
+          </a:prstGeom>
+        </p:spPr>
+        <p:style>
+          <a:lnRef idx="2">
+            <a:schemeClr val="accent1">
+              <a:shade val="15000"/>
+            </a:schemeClr>
+          </a:lnRef>
+          <a:fillRef idx="1">
+            <a:schemeClr val="accent1"/>
+          </a:fillRef>
+          <a:effectRef idx="0">
+            <a:schemeClr val="accent1"/>
+          </a:effectRef>
+          <a:fontRef idx="minor">
+            <a:schemeClr val="lt1"/>
+          </a:fontRef>
+        </p:style>
+        <p:txBody>
+          <a:bodyPr rtlCol="1" anchor="ctr"/>
+          <a:lstStyle/>
+          <a:p>
+            <a:pPr algn="ctr"/>
+            <a:r>
+              <a:rPr lang="he-IL" sz="2000" dirty="0">
+                <a:solidFill>
+                  <a:srgbClr val="FFFF00"/>
+                </a:solidFill>
+              </a:rPr>
+              <a:t>שאילתות של הסוכנים</a:t>
+            </a:r>
+            <a:endParaRPr lang="en-US" sz="2000" dirty="0">
+              <a:solidFill>
+                <a:srgbClr val="FFFF00"/>
+              </a:solidFill>
+            </a:endParaRPr>
+          </a:p>
+        </p:txBody>
+      </p:sp>
+      <p:sp>
+        <p:nvSpPr>
+          <p:cNvPr id="16" name="מלבן 15">
+            <a:extLst>
+              <a:ext uri="{FF2B5EF4-FFF2-40B4-BE49-F238E27FC236}">
+                <a16:creationId xmlns:a16="http://schemas.microsoft.com/office/drawing/2014/main" id="{FBFF6FB5-3CAE-8912-61ED-880D8E57B26D}"/>
+              </a:ext>
+            </a:extLst>
+          </p:cNvPr>
+          <p:cNvSpPr/>
+          <p:nvPr/>
+        </p:nvSpPr>
+        <p:spPr>
+          <a:xfrm>
+            <a:off x="4640826" y="2985939"/>
+            <a:ext cx="1986116" cy="1967025"/>
+          </a:xfrm>
+          <a:prstGeom prst="rect">
+            <a:avLst/>
+          </a:prstGeom>
+        </p:spPr>
+        <p:style>
+          <a:lnRef idx="2">
+            <a:schemeClr val="accent1">
+              <a:shade val="15000"/>
+            </a:schemeClr>
+          </a:lnRef>
+          <a:fillRef idx="1">
+            <a:schemeClr val="accent1"/>
+          </a:fillRef>
+          <a:effectRef idx="0">
+            <a:schemeClr val="accent1"/>
+          </a:effectRef>
+          <a:fontRef idx="minor">
+            <a:schemeClr val="lt1"/>
+          </a:fontRef>
+        </p:style>
+        <p:txBody>
+          <a:bodyPr rtlCol="1" anchor="ctr"/>
+          <a:lstStyle/>
+          <a:p>
+            <a:pPr algn="ctr"/>
+            <a:r>
+              <a:rPr lang="he-IL" sz="2000" dirty="0">
+                <a:solidFill>
+                  <a:srgbClr val="FFFF00"/>
+                </a:solidFill>
+              </a:rPr>
+              <a:t>כתיבה של מידע חדש על ידי הסוכן הראשי</a:t>
+            </a:r>
+            <a:endParaRPr lang="en-US" sz="2000" dirty="0">
+              <a:solidFill>
+                <a:srgbClr val="FFFF00"/>
+              </a:solidFill>
+            </a:endParaRPr>
+          </a:p>
+        </p:txBody>
+      </p:sp>
+      <p:sp>
+        <p:nvSpPr>
+          <p:cNvPr id="17" name="מלבן 16">
+            <a:extLst>
+              <a:ext uri="{FF2B5EF4-FFF2-40B4-BE49-F238E27FC236}">
+                <a16:creationId xmlns:a16="http://schemas.microsoft.com/office/drawing/2014/main" id="{7F0F1257-310A-8F23-00AF-747C3081C267}"/>
+              </a:ext>
+            </a:extLst>
+          </p:cNvPr>
+          <p:cNvSpPr/>
+          <p:nvPr/>
+        </p:nvSpPr>
+        <p:spPr>
+          <a:xfrm>
+            <a:off x="1446304" y="2985939"/>
+            <a:ext cx="2746672" cy="1967025"/>
+          </a:xfrm>
+          <a:prstGeom prst="rect">
+            <a:avLst/>
+          </a:prstGeom>
+        </p:spPr>
+        <p:style>
+          <a:lnRef idx="2">
+            <a:schemeClr val="accent1">
+              <a:shade val="15000"/>
+            </a:schemeClr>
+          </a:lnRef>
+          <a:fillRef idx="1">
+            <a:schemeClr val="accent1"/>
+          </a:fillRef>
+          <a:effectRef idx="0">
+            <a:schemeClr val="accent1"/>
+          </a:effectRef>
+          <a:fontRef idx="minor">
+            <a:schemeClr val="lt1"/>
+          </a:fontRef>
+        </p:style>
+        <p:txBody>
+          <a:bodyPr rtlCol="1" anchor="ctr"/>
+          <a:lstStyle/>
+          <a:p>
+            <a:pPr algn="ctr"/>
+            <a:r>
+              <a:rPr lang="he-IL" sz="2000" dirty="0">
+                <a:solidFill>
+                  <a:srgbClr val="FFFF00"/>
+                </a:solidFill>
+              </a:rPr>
+              <a:t>במקרה של סיכום גזרתי נפנה לטווח הרלוונטי שסוכם ב </a:t>
+            </a:r>
+            <a:r>
+              <a:rPr lang="en-US" sz="2000" dirty="0">
+                <a:solidFill>
+                  <a:srgbClr val="FFFF00"/>
+                </a:solidFill>
+              </a:rPr>
+              <a:t>DB </a:t>
+            </a:r>
+            <a:r>
+              <a:rPr lang="he-IL" sz="2000" dirty="0">
+                <a:solidFill>
+                  <a:srgbClr val="FFFF00"/>
+                </a:solidFill>
+              </a:rPr>
+              <a:t>על ידי סוכן ההיסטוריה</a:t>
+            </a:r>
+            <a:endParaRPr lang="en-US" sz="2000" dirty="0">
+              <a:solidFill>
+                <a:srgbClr val="FFFF00"/>
+              </a:solidFill>
+            </a:endParaRPr>
+          </a:p>
+        </p:txBody>
+      </p:sp>
+    </p:spTree>
+    <p:extLst>
+      <p:ext uri="{BB962C8B-B14F-4D97-AF65-F5344CB8AC3E}">
+        <p14:creationId xmlns:p14="http://schemas.microsoft.com/office/powerpoint/2010/main" val="4233393751"/>
+      </p:ext>
+    </p:extLst>
+  </p:cSld>
+  <p:clrMapOvr>
+    <a:masterClrMapping/>
+  </p:clrMapOvr>
+  <mc:AlternateContent xmlns:mc="http://schemas.openxmlformats.org/markup-compatibility/2006">
+    <mc:Choice xmlns:p159="http://schemas.microsoft.com/office/powerpoint/2015/09/main" Requires="p159">
+      <p:transition xmlns:p14="http://schemas.microsoft.com/office/powerpoint/2010/main" spd="slow" p14:dur="2000">
+        <p159:morph option="byObject"/>
+      </p:transition>
+    </mc:Choice>
+    <mc:Fallback>
+      <p:transition spd="slow">
+        <p:fade/>
+      </p:transition>
+    </mc:Fallback>
+  </mc:AlternateContent>
 </p:sld>
 </file>
 

--- a/docs/ארכיטקטוררה.pptx
+++ b/docs/ארכיטקטוררה.pptx
@@ -7,10 +7,9 @@
   <p:sldIdLst>
     <p:sldId id="256" r:id="rId2"/>
     <p:sldId id="257" r:id="rId3"/>
-    <p:sldId id="259" r:id="rId4"/>
-    <p:sldId id="258" r:id="rId5"/>
-    <p:sldId id="260" r:id="rId6"/>
-    <p:sldId id="261" r:id="rId7"/>
+    <p:sldId id="258" r:id="rId4"/>
+    <p:sldId id="260" r:id="rId5"/>
+    <p:sldId id="261" r:id="rId6"/>
   </p:sldIdLst>
   <p:sldSz cx="12192000" cy="6858000"/>
   <p:notesSz cx="6858000" cy="9144000"/>
@@ -264,7 +263,7 @@
           <a:p>
             <a:fld id="{D2BE0053-837F-4510-BDD3-03379A8FE19D}" type="datetimeFigureOut">
               <a:rPr lang="he-IL" smtClean="0"/>
-              <a:t>ז'/אלול/תשפ"ו</a:t>
+              <a:t>ט'/אלול/תשפ"ו</a:t>
             </a:fld>
             <a:endParaRPr lang="he-IL"/>
           </a:p>
@@ -462,7 +461,7 @@
           <a:p>
             <a:fld id="{D2BE0053-837F-4510-BDD3-03379A8FE19D}" type="datetimeFigureOut">
               <a:rPr lang="he-IL" smtClean="0"/>
-              <a:t>ז'/אלול/תשפ"ו</a:t>
+              <a:t>ט'/אלול/תשפ"ו</a:t>
             </a:fld>
             <a:endParaRPr lang="he-IL"/>
           </a:p>
@@ -670,7 +669,7 @@
           <a:p>
             <a:fld id="{D2BE0053-837F-4510-BDD3-03379A8FE19D}" type="datetimeFigureOut">
               <a:rPr lang="he-IL" smtClean="0"/>
-              <a:t>ז'/אלול/תשפ"ו</a:t>
+              <a:t>ט'/אלול/תשפ"ו</a:t>
             </a:fld>
             <a:endParaRPr lang="he-IL"/>
           </a:p>
@@ -868,7 +867,7 @@
           <a:p>
             <a:fld id="{D2BE0053-837F-4510-BDD3-03379A8FE19D}" type="datetimeFigureOut">
               <a:rPr lang="he-IL" smtClean="0"/>
-              <a:t>ז'/אלול/תשפ"ו</a:t>
+              <a:t>ט'/אלול/תשפ"ו</a:t>
             </a:fld>
             <a:endParaRPr lang="he-IL"/>
           </a:p>
@@ -1143,7 +1142,7 @@
           <a:p>
             <a:fld id="{D2BE0053-837F-4510-BDD3-03379A8FE19D}" type="datetimeFigureOut">
               <a:rPr lang="he-IL" smtClean="0"/>
-              <a:t>ז'/אלול/תשפ"ו</a:t>
+              <a:t>ט'/אלול/תשפ"ו</a:t>
             </a:fld>
             <a:endParaRPr lang="he-IL"/>
           </a:p>
@@ -1408,7 +1407,7 @@
           <a:p>
             <a:fld id="{D2BE0053-837F-4510-BDD3-03379A8FE19D}" type="datetimeFigureOut">
               <a:rPr lang="he-IL" smtClean="0"/>
-              <a:t>ז'/אלול/תשפ"ו</a:t>
+              <a:t>ט'/אלול/תשפ"ו</a:t>
             </a:fld>
             <a:endParaRPr lang="he-IL"/>
           </a:p>
@@ -1820,7 +1819,7 @@
           <a:p>
             <a:fld id="{D2BE0053-837F-4510-BDD3-03379A8FE19D}" type="datetimeFigureOut">
               <a:rPr lang="he-IL" smtClean="0"/>
-              <a:t>ז'/אלול/תשפ"ו</a:t>
+              <a:t>ט'/אלול/תשפ"ו</a:t>
             </a:fld>
             <a:endParaRPr lang="he-IL"/>
           </a:p>
@@ -1961,7 +1960,7 @@
           <a:p>
             <a:fld id="{D2BE0053-837F-4510-BDD3-03379A8FE19D}" type="datetimeFigureOut">
               <a:rPr lang="he-IL" smtClean="0"/>
-              <a:t>ז'/אלול/תשפ"ו</a:t>
+              <a:t>ט'/אלול/תשפ"ו</a:t>
             </a:fld>
             <a:endParaRPr lang="he-IL"/>
           </a:p>
@@ -2074,7 +2073,7 @@
           <a:p>
             <a:fld id="{D2BE0053-837F-4510-BDD3-03379A8FE19D}" type="datetimeFigureOut">
               <a:rPr lang="he-IL" smtClean="0"/>
-              <a:t>ז'/אלול/תשפ"ו</a:t>
+              <a:t>ט'/אלול/תשפ"ו</a:t>
             </a:fld>
             <a:endParaRPr lang="he-IL"/>
           </a:p>
@@ -2385,7 +2384,7 @@
           <a:p>
             <a:fld id="{D2BE0053-837F-4510-BDD3-03379A8FE19D}" type="datetimeFigureOut">
               <a:rPr lang="he-IL" smtClean="0"/>
-              <a:t>ז'/אלול/תשפ"ו</a:t>
+              <a:t>ט'/אלול/תשפ"ו</a:t>
             </a:fld>
             <a:endParaRPr lang="he-IL"/>
           </a:p>
@@ -2673,7 +2672,7 @@
           <a:p>
             <a:fld id="{D2BE0053-837F-4510-BDD3-03379A8FE19D}" type="datetimeFigureOut">
               <a:rPr lang="he-IL" smtClean="0"/>
-              <a:t>ז'/אלול/תשפ"ו</a:t>
+              <a:t>ט'/אלול/תשפ"ו</a:t>
             </a:fld>
             <a:endParaRPr lang="he-IL"/>
           </a:p>
@@ -2914,7 +2913,7 @@
           <a:p>
             <a:fld id="{D2BE0053-837F-4510-BDD3-03379A8FE19D}" type="datetimeFigureOut">
               <a:rPr lang="he-IL" smtClean="0"/>
-              <a:t>ז'/אלול/תשפ"ו</a:t>
+              <a:t>ט'/אלול/תשפ"ו</a:t>
             </a:fld>
             <a:endParaRPr lang="he-IL"/>
           </a:p>
@@ -3935,13 +3934,13 @@
   <p:clrMapOvr>
     <a:masterClrMapping/>
   </p:clrMapOvr>
-  <mc:AlternateContent xmlns:mc="http://schemas.openxmlformats.org/markup-compatibility/2006">
-    <mc:Choice xmlns:p159="http://schemas.microsoft.com/office/powerpoint/2015/09/main" Requires="p159">
+  <mc:AlternateContent xmlns:mc="http://schemas.openxmlformats.org/markup-compatibility/2006" xmlns:p159="http://schemas.microsoft.com/office/powerpoint/2015/09/main">
+    <mc:Choice Requires="p159">
       <p:transition xmlns:p14="http://schemas.microsoft.com/office/powerpoint/2010/main" spd="slow" p14:dur="2000">
         <p159:morph option="byObject"/>
       </p:transition>
     </mc:Choice>
-    <mc:Fallback>
+    <mc:Fallback xmlns="">
       <p:transition spd="slow">
         <p:fade/>
       </p:transition>
@@ -4210,264 +4209,6 @@
         <p:cNvPr id="1" name="">
           <a:extLst>
             <a:ext uri="{FF2B5EF4-FFF2-40B4-BE49-F238E27FC236}">
-              <a16:creationId xmlns:a16="http://schemas.microsoft.com/office/drawing/2014/main" id="{3CF7357A-CF66-1811-D2DB-48F559E6CCFA}"/>
-            </a:ext>
-          </a:extLst>
-        </p:cNvPr>
-        <p:cNvGrpSpPr/>
-        <p:nvPr/>
-      </p:nvGrpSpPr>
-      <p:grpSpPr>
-        <a:xfrm>
-          <a:off x="0" y="0"/>
-          <a:ext cx="0" cy="0"/>
-          <a:chOff x="0" y="0"/>
-          <a:chExt cx="0" cy="0"/>
-        </a:xfrm>
-      </p:grpSpPr>
-      <p:sp>
-        <p:nvSpPr>
-          <p:cNvPr id="5" name="מלבן 4">
-            <a:extLst>
-              <a:ext uri="{FF2B5EF4-FFF2-40B4-BE49-F238E27FC236}">
-                <a16:creationId xmlns:a16="http://schemas.microsoft.com/office/drawing/2014/main" id="{4B55CFD6-21B0-885F-F8E6-376CFD40DDB1}"/>
-              </a:ext>
-            </a:extLst>
-          </p:cNvPr>
-          <p:cNvSpPr/>
-          <p:nvPr/>
-        </p:nvSpPr>
-        <p:spPr>
-          <a:xfrm>
-            <a:off x="646043" y="268357"/>
-            <a:ext cx="11032435" cy="6380921"/>
-          </a:xfrm>
-          <a:prstGeom prst="rect">
-            <a:avLst/>
-          </a:prstGeom>
-        </p:spPr>
-        <p:style>
-          <a:lnRef idx="2">
-            <a:schemeClr val="accent1">
-              <a:shade val="15000"/>
-            </a:schemeClr>
-          </a:lnRef>
-          <a:fillRef idx="1">
-            <a:schemeClr val="accent1"/>
-          </a:fillRef>
-          <a:effectRef idx="0">
-            <a:schemeClr val="accent1"/>
-          </a:effectRef>
-          <a:fontRef idx="minor">
-            <a:schemeClr val="lt1"/>
-          </a:fontRef>
-        </p:style>
-        <p:txBody>
-          <a:bodyPr rtlCol="1" anchor="t"/>
-          <a:lstStyle/>
-          <a:p>
-            <a:pPr algn="ctr"/>
-            <a:r>
-              <a:rPr lang="he-IL" sz="3600" dirty="0"/>
-              <a:t>סוכן חוזי</a:t>
-            </a:r>
-          </a:p>
-        </p:txBody>
-      </p:sp>
-      <p:sp>
-        <p:nvSpPr>
-          <p:cNvPr id="6" name="מלבן 5">
-            <a:extLst>
-              <a:ext uri="{FF2B5EF4-FFF2-40B4-BE49-F238E27FC236}">
-                <a16:creationId xmlns:a16="http://schemas.microsoft.com/office/drawing/2014/main" id="{69A826E0-3002-3083-40AA-63C4183D90E2}"/>
-              </a:ext>
-            </a:extLst>
-          </p:cNvPr>
-          <p:cNvSpPr/>
-          <p:nvPr/>
-        </p:nvSpPr>
-        <p:spPr>
-          <a:xfrm>
-            <a:off x="1540563" y="1361662"/>
-            <a:ext cx="9243394" cy="665922"/>
-          </a:xfrm>
-          <a:prstGeom prst="rect">
-            <a:avLst/>
-          </a:prstGeom>
-          <a:solidFill>
-            <a:schemeClr val="bg1">
-              <a:lumMod val="65000"/>
-            </a:schemeClr>
-          </a:solidFill>
-        </p:spPr>
-        <p:style>
-          <a:lnRef idx="2">
-            <a:schemeClr val="accent1">
-              <a:shade val="15000"/>
-            </a:schemeClr>
-          </a:lnRef>
-          <a:fillRef idx="1">
-            <a:schemeClr val="accent1"/>
-          </a:fillRef>
-          <a:effectRef idx="0">
-            <a:schemeClr val="accent1"/>
-          </a:effectRef>
-          <a:fontRef idx="minor">
-            <a:schemeClr val="lt1"/>
-          </a:fontRef>
-        </p:style>
-        <p:txBody>
-          <a:bodyPr rtlCol="1" anchor="t"/>
-          <a:lstStyle/>
-          <a:p>
-            <a:pPr algn="l"/>
-            <a:r>
-              <a:rPr lang="en-US" sz="3600" dirty="0"/>
-              <a:t>Role = what is the agent care about</a:t>
-            </a:r>
-            <a:endParaRPr lang="he-IL" sz="3600" dirty="0"/>
-          </a:p>
-        </p:txBody>
-      </p:sp>
-      <p:sp>
-        <p:nvSpPr>
-          <p:cNvPr id="7" name="מלבן 6">
-            <a:extLst>
-              <a:ext uri="{FF2B5EF4-FFF2-40B4-BE49-F238E27FC236}">
-                <a16:creationId xmlns:a16="http://schemas.microsoft.com/office/drawing/2014/main" id="{2A72C5AA-3885-8E3D-18A6-0A9970754275}"/>
-              </a:ext>
-            </a:extLst>
-          </p:cNvPr>
-          <p:cNvSpPr/>
-          <p:nvPr/>
-        </p:nvSpPr>
-        <p:spPr>
-          <a:xfrm>
-            <a:off x="1540563" y="2454967"/>
-            <a:ext cx="9243394" cy="665922"/>
-          </a:xfrm>
-          <a:prstGeom prst="rect">
-            <a:avLst/>
-          </a:prstGeom>
-          <a:solidFill>
-            <a:schemeClr val="bg1">
-              <a:lumMod val="65000"/>
-            </a:schemeClr>
-          </a:solidFill>
-        </p:spPr>
-        <p:style>
-          <a:lnRef idx="2">
-            <a:schemeClr val="accent1">
-              <a:shade val="15000"/>
-            </a:schemeClr>
-          </a:lnRef>
-          <a:fillRef idx="1">
-            <a:schemeClr val="accent1"/>
-          </a:fillRef>
-          <a:effectRef idx="0">
-            <a:schemeClr val="accent1"/>
-          </a:effectRef>
-          <a:fontRef idx="minor">
-            <a:schemeClr val="lt1"/>
-          </a:fontRef>
-        </p:style>
-        <p:txBody>
-          <a:bodyPr rtlCol="1" anchor="t"/>
-          <a:lstStyle/>
-          <a:p>
-            <a:pPr algn="l"/>
-            <a:r>
-              <a:rPr lang="en-US" sz="3600" dirty="0"/>
-              <a:t>Tools = [tool1,tool2,…..]</a:t>
-            </a:r>
-            <a:endParaRPr lang="he-IL" sz="3600" dirty="0"/>
-          </a:p>
-        </p:txBody>
-      </p:sp>
-      <p:sp>
-        <p:nvSpPr>
-          <p:cNvPr id="8" name="מלבן 7">
-            <a:extLst>
-              <a:ext uri="{FF2B5EF4-FFF2-40B4-BE49-F238E27FC236}">
-                <a16:creationId xmlns:a16="http://schemas.microsoft.com/office/drawing/2014/main" id="{89821A07-0D0F-B49B-C4DE-4605E994DF1A}"/>
-              </a:ext>
-            </a:extLst>
-          </p:cNvPr>
-          <p:cNvSpPr/>
-          <p:nvPr/>
-        </p:nvSpPr>
-        <p:spPr>
-          <a:xfrm>
-            <a:off x="1540563" y="3548272"/>
-            <a:ext cx="9243394" cy="665922"/>
-          </a:xfrm>
-          <a:prstGeom prst="rect">
-            <a:avLst/>
-          </a:prstGeom>
-          <a:solidFill>
-            <a:schemeClr val="bg1">
-              <a:lumMod val="65000"/>
-            </a:schemeClr>
-          </a:solidFill>
-        </p:spPr>
-        <p:style>
-          <a:lnRef idx="2">
-            <a:schemeClr val="accent1">
-              <a:shade val="15000"/>
-            </a:schemeClr>
-          </a:lnRef>
-          <a:fillRef idx="1">
-            <a:schemeClr val="accent1"/>
-          </a:fillRef>
-          <a:effectRef idx="0">
-            <a:schemeClr val="accent1"/>
-          </a:effectRef>
-          <a:fontRef idx="minor">
-            <a:schemeClr val="lt1"/>
-          </a:fontRef>
-        </p:style>
-        <p:txBody>
-          <a:bodyPr rtlCol="1" anchor="t"/>
-          <a:lstStyle/>
-          <a:p>
-            <a:pPr algn="l"/>
-            <a:r>
-              <a:rPr lang="en-US" sz="3600" dirty="0"/>
-              <a:t>Handle(action = “do …” , </a:t>
-            </a:r>
-            <a:r>
-              <a:rPr lang="en-US" sz="3600" dirty="0" err="1"/>
-              <a:t>allowed_tools</a:t>
-            </a:r>
-            <a:r>
-              <a:rPr lang="en-US" sz="3600" dirty="0"/>
-              <a:t>);</a:t>
-            </a:r>
-            <a:endParaRPr lang="he-IL" sz="3600" dirty="0"/>
-          </a:p>
-        </p:txBody>
-      </p:sp>
-    </p:spTree>
-    <p:extLst>
-      <p:ext uri="{BB962C8B-B14F-4D97-AF65-F5344CB8AC3E}">
-        <p14:creationId xmlns:p14="http://schemas.microsoft.com/office/powerpoint/2010/main" val="1567137398"/>
-      </p:ext>
-    </p:extLst>
-  </p:cSld>
-  <p:clrMapOvr>
-    <a:masterClrMapping/>
-  </p:clrMapOvr>
-</p:sld>
-</file>
-
-<file path=ppt/slides/slide4.xml><?xml version="1.0" encoding="utf-8"?>
-<p:sld xmlns:a="http://schemas.openxmlformats.org/drawingml/2006/main" xmlns:r="http://schemas.openxmlformats.org/officeDocument/2006/relationships" xmlns:p="http://schemas.openxmlformats.org/presentationml/2006/main">
-  <p:cSld>
-    <p:spTree>
-      <p:nvGrpSpPr>
-        <p:cNvPr id="1" name="">
-          <a:extLst>
-            <a:ext uri="{FF2B5EF4-FFF2-40B4-BE49-F238E27FC236}">
               <a16:creationId xmlns:a16="http://schemas.microsoft.com/office/drawing/2014/main" id="{97DE1CC6-6368-16B9-49F6-0452CC9E2ABE}"/>
             </a:ext>
           </a:extLst>
@@ -4821,7 +4562,7 @@
 </p:sld>
 </file>
 
-<file path=ppt/slides/slide5.xml><?xml version="1.0" encoding="utf-8"?>
+<file path=ppt/slides/slide4.xml><?xml version="1.0" encoding="utf-8"?>
 <p:sld xmlns:a="http://schemas.openxmlformats.org/drawingml/2006/main" xmlns:r="http://schemas.openxmlformats.org/officeDocument/2006/relationships" xmlns:p="http://schemas.openxmlformats.org/presentationml/2006/main">
   <p:cSld>
     <p:spTree>
@@ -4907,7 +4648,7 @@
 </p:sld>
 </file>
 
-<file path=ppt/slides/slide6.xml><?xml version="1.0" encoding="utf-8"?>
+<file path=ppt/slides/slide5.xml><?xml version="1.0" encoding="utf-8"?>
 <p:sld xmlns:a="http://schemas.openxmlformats.org/drawingml/2006/main" xmlns:r="http://schemas.openxmlformats.org/officeDocument/2006/relationships" xmlns:p="http://schemas.openxmlformats.org/presentationml/2006/main">
   <p:cSld>
     <p:spTree>
@@ -5339,13 +5080,13 @@
   <p:clrMapOvr>
     <a:masterClrMapping/>
   </p:clrMapOvr>
-  <mc:AlternateContent xmlns:mc="http://schemas.openxmlformats.org/markup-compatibility/2006">
-    <mc:Choice xmlns:p159="http://schemas.microsoft.com/office/powerpoint/2015/09/main" Requires="p159">
+  <mc:AlternateContent xmlns:mc="http://schemas.openxmlformats.org/markup-compatibility/2006" xmlns:p159="http://schemas.microsoft.com/office/powerpoint/2015/09/main">
+    <mc:Choice Requires="p159">
       <p:transition xmlns:p14="http://schemas.microsoft.com/office/powerpoint/2010/main" spd="slow" p14:dur="2000">
         <p159:morph option="byObject"/>
       </p:transition>
     </mc:Choice>
-    <mc:Fallback>
+    <mc:Fallback xmlns="">
       <p:transition spd="slow">
         <p:fade/>
       </p:transition>
